--- a/kotonara-brand-template-nologo-2.pptx
+++ b/kotonara-brand-template-nologo-2.pptx
@@ -512,7 +512,7 @@
           <a:p>
             <a:pPr algn="l"/>
             <a:r>
-              <a:rPr lang="ja-JP" sz="1500" b="1" spc="300" dirty="0">
+              <a:rPr lang="ja-JP" sz="1300" b="1" spc="300" dirty="0">
                 <a:solidFill>
                   <a:schemeClr val="bg1"/>
                 </a:solidFill>
